--- a/Lab Materials/Day 1 - Lab Materials/Activity 1/GitHub Commits & Pull Requests.pptx
+++ b/Lab Materials/Day 1 - Lab Materials/Activity 1/GitHub Commits & Pull Requests.pptx
@@ -148,7 +148,7 @@
 <file path=ppt/revisionInfo.xml><?xml version="1.0" encoding="utf-8"?>
 <p1510:revInfo xmlns:a="http://schemas.openxmlformats.org/drawingml/2006/main" xmlns:r="http://schemas.openxmlformats.org/officeDocument/2006/relationships" xmlns:p1510="http://schemas.microsoft.com/office/powerpoint/2015/10/main">
   <p1510:revLst>
-    <p1510:client id="{00DBB519-B598-4F11-8496-1BD1C4D3AADC}" v="2" dt="2026-07-20T02:24:05.878"/>
+    <p1510:client id="{6798E25B-25ED-4569-8080-26AC3B23D45A}" v="1" dt="2026-07-21T20:02:49.457"/>
   </p1510:revLst>
 </p1510:revInfo>
 </file>
@@ -158,10 +158,25 @@
   <pc:docChgLst>
     <pc:chgData name="ambleic@clemson.edu" userId="43615028507_tp_box_2" providerId="OAuth2" clId="{5F4B9ABB-DEB5-4DC3-A8F9-1752A2D02C85}"/>
     <pc:docChg chg="modSld">
-      <pc:chgData name="ambleic@clemson.edu" userId="43615028507_tp_box_2" providerId="OAuth2" clId="{5F4B9ABB-DEB5-4DC3-A8F9-1752A2D02C85}" dt="2026-07-20T02:24:05.878" v="26"/>
+      <pc:chgData name="ambleic@clemson.edu" userId="43615028507_tp_box_2" providerId="OAuth2" clId="{5F4B9ABB-DEB5-4DC3-A8F9-1752A2D02C85}" dt="2026-07-21T20:02:49.457" v="27"/>
       <pc:docMkLst>
         <pc:docMk/>
       </pc:docMkLst>
+      <pc:sldChg chg="modSp">
+        <pc:chgData name="ambleic@clemson.edu" userId="43615028507_tp_box_2" providerId="OAuth2" clId="{5F4B9ABB-DEB5-4DC3-A8F9-1752A2D02C85}" dt="2026-07-21T20:02:49.457" v="27"/>
+        <pc:sldMkLst>
+          <pc:docMk/>
+          <pc:sldMk cId="3886218017" sldId="426"/>
+        </pc:sldMkLst>
+        <pc:spChg chg="mod">
+          <ac:chgData name="ambleic@clemson.edu" userId="43615028507_tp_box_2" providerId="OAuth2" clId="{5F4B9ABB-DEB5-4DC3-A8F9-1752A2D02C85}" dt="2026-07-21T20:02:49.457" v="27"/>
+          <ac:spMkLst>
+            <pc:docMk/>
+            <pc:sldMk cId="3886218017" sldId="426"/>
+            <ac:spMk id="27" creationId="{1B0207FA-97BD-2917-EBDF-A708BDBBCF75}"/>
+          </ac:spMkLst>
+        </pc:spChg>
+      </pc:sldChg>
       <pc:sldChg chg="modNotesTx">
         <pc:chgData name="ambleic@clemson.edu" userId="43615028507_tp_box_2" providerId="OAuth2" clId="{5F4B9ABB-DEB5-4DC3-A8F9-1752A2D02C85}" dt="2026-07-20T02:21:32.696" v="0" actId="20577"/>
         <pc:sldMkLst>
@@ -302,7 +317,7 @@
           <a:p>
             <a:fld id="{396B4A52-D009-4DAD-97A1-E9E8A9C07555}" type="datetimeFigureOut">
               <a:rPr lang="en-US" smtClean="0"/>
-              <a:t>7/19/2026</a:t>
+              <a:t>7/21/2026</a:t>
             </a:fld>
             <a:endParaRPr lang="en-US"/>
           </a:p>
@@ -1652,7 +1667,7 @@
           <a:p>
             <a:fld id="{0149C927-FC8C-4E5E-ADC9-E8BAD3639D69}" type="datetimeFigureOut">
               <a:rPr lang="en-US" smtClean="0"/>
-              <a:t>7/19/2026</a:t>
+              <a:t>7/21/2026</a:t>
             </a:fld>
             <a:endParaRPr lang="en-US"/>
           </a:p>
@@ -1850,7 +1865,7 @@
           <a:p>
             <a:fld id="{0149C927-FC8C-4E5E-ADC9-E8BAD3639D69}" type="datetimeFigureOut">
               <a:rPr lang="en-US" smtClean="0"/>
-              <a:t>7/19/2026</a:t>
+              <a:t>7/21/2026</a:t>
             </a:fld>
             <a:endParaRPr lang="en-US"/>
           </a:p>
@@ -2058,7 +2073,7 @@
           <a:p>
             <a:fld id="{0149C927-FC8C-4E5E-ADC9-E8BAD3639D69}" type="datetimeFigureOut">
               <a:rPr lang="en-US" smtClean="0"/>
-              <a:t>7/19/2026</a:t>
+              <a:t>7/21/2026</a:t>
             </a:fld>
             <a:endParaRPr lang="en-US"/>
           </a:p>
@@ -2291,7 +2306,7 @@
           <a:p>
             <a:fld id="{0149C927-FC8C-4E5E-ADC9-E8BAD3639D69}" type="datetimeFigureOut">
               <a:rPr lang="en-US" smtClean="0"/>
-              <a:t>7/19/2026</a:t>
+              <a:t>7/21/2026</a:t>
             </a:fld>
             <a:endParaRPr lang="en-US"/>
           </a:p>
@@ -2566,7 +2581,7 @@
           <a:p>
             <a:fld id="{0149C927-FC8C-4E5E-ADC9-E8BAD3639D69}" type="datetimeFigureOut">
               <a:rPr lang="en-US" smtClean="0"/>
-              <a:t>7/19/2026</a:t>
+              <a:t>7/21/2026</a:t>
             </a:fld>
             <a:endParaRPr lang="en-US"/>
           </a:p>
@@ -2831,7 +2846,7 @@
           <a:p>
             <a:fld id="{0149C927-FC8C-4E5E-ADC9-E8BAD3639D69}" type="datetimeFigureOut">
               <a:rPr lang="en-US" smtClean="0"/>
-              <a:t>7/19/2026</a:t>
+              <a:t>7/21/2026</a:t>
             </a:fld>
             <a:endParaRPr lang="en-US"/>
           </a:p>
@@ -3243,7 +3258,7 @@
           <a:p>
             <a:fld id="{0149C927-FC8C-4E5E-ADC9-E8BAD3639D69}" type="datetimeFigureOut">
               <a:rPr lang="en-US" smtClean="0"/>
-              <a:t>7/19/2026</a:t>
+              <a:t>7/21/2026</a:t>
             </a:fld>
             <a:endParaRPr lang="en-US"/>
           </a:p>
@@ -3384,7 +3399,7 @@
           <a:p>
             <a:fld id="{0149C927-FC8C-4E5E-ADC9-E8BAD3639D69}" type="datetimeFigureOut">
               <a:rPr lang="en-US" smtClean="0"/>
-              <a:t>7/19/2026</a:t>
+              <a:t>7/21/2026</a:t>
             </a:fld>
             <a:endParaRPr lang="en-US"/>
           </a:p>
@@ -3497,7 +3512,7 @@
           <a:p>
             <a:fld id="{0149C927-FC8C-4E5E-ADC9-E8BAD3639D69}" type="datetimeFigureOut">
               <a:rPr lang="en-US" smtClean="0"/>
-              <a:t>7/19/2026</a:t>
+              <a:t>7/21/2026</a:t>
             </a:fld>
             <a:endParaRPr lang="en-US"/>
           </a:p>
@@ -3808,7 +3823,7 @@
           <a:p>
             <a:fld id="{0149C927-FC8C-4E5E-ADC9-E8BAD3639D69}" type="datetimeFigureOut">
               <a:rPr lang="en-US" smtClean="0"/>
-              <a:t>7/19/2026</a:t>
+              <a:t>7/21/2026</a:t>
             </a:fld>
             <a:endParaRPr lang="en-US"/>
           </a:p>
@@ -4096,7 +4111,7 @@
           <a:p>
             <a:fld id="{0149C927-FC8C-4E5E-ADC9-E8BAD3639D69}" type="datetimeFigureOut">
               <a:rPr lang="en-US" smtClean="0"/>
-              <a:t>7/19/2026</a:t>
+              <a:t>7/21/2026</a:t>
             </a:fld>
             <a:endParaRPr lang="en-US"/>
           </a:p>
@@ -4337,7 +4352,7 @@
           <a:p>
             <a:fld id="{0149C927-FC8C-4E5E-ADC9-E8BAD3639D69}" type="datetimeFigureOut">
               <a:rPr lang="en-US" smtClean="0"/>
-              <a:t>7/19/2026</a:t>
+              <a:t>7/21/2026</a:t>
             </a:fld>
             <a:endParaRPr lang="en-US"/>
           </a:p>
@@ -14783,7 +14798,7 @@
                 <a:ea typeface="Trebuchet MS" pitchFamily="34" charset="-122"/>
                 <a:cs typeface="Arial" panose="020B0604020202020204" pitchFamily="34" charset="0"/>
               </a:rPr>
-              <a:t>Incremental Revisions</a:t>
+              <a:t>Refinement</a:t>
             </a:r>
           </a:p>
         </p:txBody>
